--- a/output/GS_050M/Deck.pptx
+++ b/output/GS_050M/Deck.pptx
@@ -6697,7 +6697,7 @@
                   <a:srgbClr val="1B1F2A"/>
                 </a:solidFill>
               </a:rPr>
-              <a:t>If delivery payments arrive at handover the peak shortage is EGP 269 million; if sales slip 12 months with prices 10% lower it is EGP 441 million. Jalour will fund gaps above project cash.</a:t>
+              <a:t>If delivery payments arrive at handover the peak shortage is EGP 269 million; if sales slip 12 months with prices 10% lower it is EGP 441 million. Jalour will cover gaps above project cash from its cash reserves and cash from other projects it is constructing.</a:t>
             </a:r>
             <a:endParaRPr lang="en-US" sz="1300" dirty="0"/>
           </a:p>
@@ -7518,7 +7518,7 @@
                             <a:srgbClr val="1B1F2A"/>
                           </a:solidFill>
                         </a:rPr>
-                        <a:t>Yes: value moves with Mostakbal City prices (final list 1.43x launch)</a:t>
+                        <a:t>Yes: value moves with Mostakbal City prices (delivery list 1.43x launch)</a:t>
                       </a:r>
                       <a:endParaRPr lang="en-US" sz="1300" dirty="0"/>
                     </a:p>
@@ -9073,7 +9073,7 @@
                   <a:srgbClr val="1B1F2A"/>
                 </a:solidFill>
               </a:rPr>
-              <a:t>Sponsor funding undertaking for project funding gaps; no guarantee of return</a:t>
+              <a:t>Sponsor funding undertaking for project gaps from Jalour cash reserves and other projects' cash; no guarantee of return</a:t>
             </a:r>
             <a:endParaRPr lang="en-US" sz="1300" dirty="0"/>
           </a:p>
@@ -10960,7 +10960,7 @@
                   <a:srgbClr val="1B1F2A"/>
                 </a:solidFill>
               </a:rPr>
-              <a:t>Option A break-even: the units could be resold at 36% of the final list price before the ticket is lost.</a:t>
+              <a:t>Option A break-even: the units could be resold at 36% of the delivery list price before the ticket is lost.</a:t>
             </a:r>
             <a:endParaRPr lang="en-US" sz="1200" dirty="0"/>
           </a:p>
@@ -11499,7 +11499,7 @@
                             <a:srgbClr val="1B1F2A"/>
                           </a:solidFill>
                         </a:rPr>
-                        <a:t>Contractual milestone; Jalour funds any gap; stress case shown</a:t>
+                        <a:t>Contractual milestone; Jalour covers any gap from cash reserves and other projects' cash; stress case shown</a:t>
                       </a:r>
                       <a:endParaRPr lang="en-US" sz="1200" dirty="0"/>
                     </a:p>
@@ -16867,7 +16867,7 @@
                             <a:srgbClr val="1B1F2A"/>
                           </a:solidFill>
                         </a:rPr>
-                        <a:t>Launch EGP 135,000 per m2, rising to 200,000 at the final list</a:t>
+                        <a:t>Launch EGP 135,000 per m2, rising to 200,000 at the delivery list</a:t>
                       </a:r>
                       <a:endParaRPr lang="en-US" sz="1200" dirty="0"/>
                     </a:p>
@@ -17237,7 +17237,7 @@
                             <a:srgbClr val="1B1F2A"/>
                           </a:solidFill>
                         </a:rPr>
-                        <a:t>Launch to final list: +33% retail, +48% offices over the sales window</a:t>
+                        <a:t>Launch to delivery list: +33% retail, +48% offices; offices +77% on today's asking, about 15% a year</a:t>
                       </a:r>
                       <a:endParaRPr lang="en-US" sz="1200" dirty="0"/>
                     </a:p>
@@ -20176,7 +20176,7 @@
                   <a:srgbClr val="1B1F2A"/>
                 </a:solidFill>
               </a:rPr>
-              <a:t>Funds project funding gaps from sponsor equity or other capital sources (to be documented)</a:t>
+              <a:t>Covers project funding gaps from its cash reserves and cash from other projects it is constructing (to be documented)</a:t>
             </a:r>
             <a:endParaRPr lang="en-US" sz="1400" dirty="0"/>
           </a:p>
@@ -20277,7 +20277,7 @@
                   <a:srgbClr val="1B1F2A"/>
                 </a:solidFill>
               </a:rPr>
-              <a:t>[To be provided by Jalour: completed projects, area delivered and units handed over]</a:t>
+              <a:t>Completed projects, area delivered and units handed over</a:t>
             </a:r>
             <a:endParaRPr lang="en-US" sz="1400" dirty="0"/>
           </a:p>
@@ -20295,7 +20295,7 @@
                   <a:srgbClr val="1B1F2A"/>
                 </a:solidFill>
               </a:rPr>
-              <a:t>[To be provided by Jalour: management team biographies]</a:t>
+              <a:t>Management team biographies</a:t>
             </a:r>
             <a:endParaRPr lang="en-US" sz="1400" dirty="0"/>
           </a:p>
@@ -20313,7 +20313,7 @@
                   <a:srgbClr val="1B1F2A"/>
                 </a:solidFill>
               </a:rPr>
-              <a:t>[To be provided by Jalour: audited financial statements of Jalour and Al Jalal Holding]</a:t>
+              <a:t>Audited financial statements of Jalour and Al Jalal Holding</a:t>
             </a:r>
             <a:endParaRPr lang="en-US" sz="1400" dirty="0"/>
           </a:p>
@@ -20331,7 +20331,25 @@
                   <a:srgbClr val="1B1F2A"/>
                 </a:solidFill>
               </a:rPr>
-              <a:t>[To be provided by Jalour: references from landlords, contractors and buyers]</a:t>
+              <a:t>References from landlords, contractors and buyers</a:t>
+            </a:r>
+            <a:endParaRPr lang="en-US" sz="1400" dirty="0"/>
+          </a:p>
+          <a:p>
+            <a:pPr marL="342900" indent="-342900">
+              <a:spcAft>
+                <a:spcPts val="600"/>
+              </a:spcAft>
+              <a:buSzPct val="100000"/>
+              <a:buChar char="•"/>
+            </a:pPr>
+            <a:r>
+              <a:rPr lang="en-US" sz="1400" dirty="0">
+                <a:solidFill>
+                  <a:srgbClr val="1B1F2A"/>
+                </a:solidFill>
+              </a:rPr>
+              <a:t>All provided after the investor signs a non-disclosure agreement</a:t>
             </a:r>
             <a:endParaRPr lang="en-US" sz="1400" dirty="0"/>
           </a:p>
@@ -20367,7 +20385,7 @@
                   <a:srgbClr val="6B7280"/>
                 </a:solidFill>
               </a:rPr>
-              <a:t>Source: Jalour Developments is the real estate arm of Al Jalal Holding, Cairo. Placeholders in brackets are pending from Jalour.</a:t>
+              <a:t>Source: Jalour Developments is the real estate arm of Al Jalal Holding, Cairo. Sponsor materials are provided after the investor signs a non-disclosure agreement.</a:t>
             </a:r>
             <a:endParaRPr lang="en-US" sz="900" dirty="0"/>
           </a:p>
@@ -20665,7 +20683,7 @@
                             <a:srgbClr val="FFFFFF"/>
                           </a:solidFill>
                         </a:rPr>
-                        <a:t>Final</a:t>
+                        <a:t>Delivery list</a:t>
                       </a:r>
                       <a:endParaRPr lang="en-US" sz="1200" dirty="0"/>
                     </a:p>

--- a/output/GS_050M/Deck.pptx
+++ b/output/GS_050M/Deck.pptx
@@ -4643,6 +4643,42 @@
         </p:nvSpPr>
         <p:spPr>
           <a:xfrm>
+            <a:off x="731520" y="5074920"/>
+            <a:ext cx="10515600" cy="548640"/>
+          </a:xfrm>
+          <a:prstGeom prst="rect">
+            <a:avLst/>
+          </a:prstGeom>
+          <a:noFill/>
+          <a:ln/>
+        </p:spPr>
+        <p:txBody>
+          <a:bodyPr wrap="square" lIns="0" tIns="0" rIns="0" bIns="0" rtlCol="0" anchor="ctr"/>
+          <a:lstStyle/>
+          <a:p>
+            <a:pPr indent="0" marL="0">
+              <a:buNone/>
+            </a:pPr>
+            <a:r>
+              <a:rPr lang="en-US" sz="1300" b="1" dirty="0">
+                <a:solidFill>
+                  <a:srgbClr val="B8893B"/>
+                </a:solidFill>
+              </a:rPr>
+              <a:t>ALL INFORMATION IN THIS PRESENTATION IS CONFIDENTIAL AND SUBJECT TO THE NON-DISCLOSURE AGREEMENT. Do not copy, forward or disclose it.</a:t>
+            </a:r>
+            <a:endParaRPr lang="en-US" sz="1300" dirty="0"/>
+          </a:p>
+        </p:txBody>
+      </p:sp>
+      <p:sp>
+        <p:nvSpPr>
+          <p:cNvPr id="7" name="Text 5"/>
+          <p:cNvSpPr txBox="1"/>
+          <p:nvPr/>
+        </p:nvSpPr>
+        <p:spPr>
+          <a:xfrm>
             <a:off x="731520" y="5852160"/>
             <a:ext cx="10515600" cy="365760"/>
           </a:xfrm>
@@ -13837,7 +13873,7 @@
                   <a:srgbClr val="AAB2BD"/>
                 </a:solidFill>
               </a:rPr>
-              <a:t>Jalour may raise further capital at project or holding level, subject to the investor's stated rights. Projections are not guarantees. Strictly private and confidential.</a:t>
+              <a:t>Jalour may raise further capital at project or holding level, subject to the investor's stated rights. Projections are not guarantees. All information in this presentation and in the other documents of this pack is confidential and subject to the non-disclosure agreement.</a:t>
             </a:r>
             <a:endParaRPr lang="en-US" sz="1100" dirty="0"/>
           </a:p>

--- a/output/GS_050M/Deck.pptx
+++ b/output/GS_050M/Deck.pptx
@@ -672,7 +672,7 @@
                 </a:solidFill>
                 <a:latin typeface="Arial"/>
               </a:rPr>
-              <a:t>Sales value by quarter of sale (EGP million, 80% of units)</a:t>
+              <a:t>Sales value by quarter of sale (EGP million)</a:t>
             </a:r>
           </a:p>
         </c:rich>
@@ -739,34 +739,34 @@
                 <c:ptCount val="10"/>
                 <c:lvl>
                   <c:pt idx="0">
+                    <c:v>M3</c:v>
+                  </c:pt>
+                  <c:pt idx="1">
+                    <c:v>M6</c:v>
+                  </c:pt>
+                  <c:pt idx="2">
                     <c:v>M9</c:v>
                   </c:pt>
-                  <c:pt idx="1">
+                  <c:pt idx="3">
                     <c:v>M12</c:v>
                   </c:pt>
-                  <c:pt idx="2">
+                  <c:pt idx="4">
                     <c:v>M15</c:v>
                   </c:pt>
-                  <c:pt idx="3">
+                  <c:pt idx="5">
                     <c:v>M18</c:v>
                   </c:pt>
-                  <c:pt idx="4">
+                  <c:pt idx="6">
                     <c:v>M21</c:v>
                   </c:pt>
-                  <c:pt idx="5">
+                  <c:pt idx="7">
                     <c:v>M24</c:v>
                   </c:pt>
-                  <c:pt idx="6">
+                  <c:pt idx="8">
                     <c:v>M27</c:v>
                   </c:pt>
-                  <c:pt idx="7">
+                  <c:pt idx="9">
                     <c:v>M30</c:v>
-                  </c:pt>
-                  <c:pt idx="8">
-                    <c:v>M33</c:v>
-                  </c:pt>
-                  <c:pt idx="9">
-                    <c:v>M36</c:v>
                   </c:pt>
                 </c:lvl>
               </c:multiLvlStrCache>
@@ -864,34 +864,34 @@
                 <c:ptCount val="10"/>
                 <c:lvl>
                   <c:pt idx="0">
+                    <c:v>M3</c:v>
+                  </c:pt>
+                  <c:pt idx="1">
+                    <c:v>M6</c:v>
+                  </c:pt>
+                  <c:pt idx="2">
                     <c:v>M9</c:v>
                   </c:pt>
-                  <c:pt idx="1">
+                  <c:pt idx="3">
                     <c:v>M12</c:v>
                   </c:pt>
-                  <c:pt idx="2">
+                  <c:pt idx="4">
                     <c:v>M15</c:v>
                   </c:pt>
-                  <c:pt idx="3">
+                  <c:pt idx="5">
                     <c:v>M18</c:v>
                   </c:pt>
-                  <c:pt idx="4">
+                  <c:pt idx="6">
                     <c:v>M21</c:v>
                   </c:pt>
-                  <c:pt idx="5">
+                  <c:pt idx="7">
                     <c:v>M24</c:v>
                   </c:pt>
-                  <c:pt idx="6">
+                  <c:pt idx="8">
                     <c:v>M27</c:v>
                   </c:pt>
-                  <c:pt idx="7">
+                  <c:pt idx="9">
                     <c:v>M30</c:v>
-                  </c:pt>
-                  <c:pt idx="8">
-                    <c:v>M33</c:v>
-                  </c:pt>
-                  <c:pt idx="9">
-                    <c:v>M36</c:v>
                   </c:pt>
                 </c:lvl>
               </c:multiLvlStrCache>
@@ -1184,38 +1184,41 @@
           </c:dLbls>
           <c:cat>
             <c:multiLvlStrRef>
-              <c:f>Sheet1!$A$2:$A$11</c:f>
+              <c:f>Sheet1!$A$2:$A$12</c:f>
               <c:multiLvlStrCache>
-                <c:ptCount val="10"/>
+                <c:ptCount val="11"/>
                 <c:lvl>
                   <c:pt idx="0">
+                    <c:v>Pre-launch</c:v>
+                  </c:pt>
+                  <c:pt idx="1">
                     <c:v>Y1</c:v>
                   </c:pt>
-                  <c:pt idx="1">
+                  <c:pt idx="2">
                     <c:v>Y2</c:v>
                   </c:pt>
-                  <c:pt idx="2">
+                  <c:pt idx="3">
                     <c:v>Y3</c:v>
                   </c:pt>
-                  <c:pt idx="3">
+                  <c:pt idx="4">
                     <c:v>Y4</c:v>
                   </c:pt>
-                  <c:pt idx="4">
+                  <c:pt idx="5">
                     <c:v>Y5</c:v>
                   </c:pt>
-                  <c:pt idx="5">
+                  <c:pt idx="6">
                     <c:v>Y6</c:v>
                   </c:pt>
-                  <c:pt idx="6">
+                  <c:pt idx="7">
                     <c:v>Y7</c:v>
                   </c:pt>
-                  <c:pt idx="7">
+                  <c:pt idx="8">
                     <c:v>Y8</c:v>
                   </c:pt>
-                  <c:pt idx="8">
+                  <c:pt idx="9">
                     <c:v>Y9</c:v>
                   </c:pt>
-                  <c:pt idx="9">
+                  <c:pt idx="10">
                     <c:v>Y10</c:v>
                   </c:pt>
                 </c:lvl>
@@ -1224,39 +1227,42 @@
           </c:cat>
           <c:val>
             <c:numRef>
-              <c:f>Sheet1!$B$2:$B$11</c:f>
+              <c:f>Sheet1!$B$2:$B$12</c:f>
               <c:numCache>
                 <c:formatCode>General</c:formatCode>
-                <c:ptCount val="10"/>
+                <c:ptCount val="11"/>
                 <c:pt idx="0">
-                  <c:v>45.4177125</c:v>
+                  <c:v>0</c:v>
                 </c:pt>
                 <c:pt idx="1">
-                  <c:v>235.096803125</c:v>
+                  <c:v>154.67525625000002</c:v>
                 </c:pt>
                 <c:pt idx="2">
-                  <c:v>937.6944359375001</c:v>
+                  <c:v>701.4219453125</c:v>
                 </c:pt>
                 <c:pt idx="3">
-                  <c:v>307.96772312499996</c:v>
+                  <c:v>530.73246875</c:v>
                 </c:pt>
                 <c:pt idx="4">
-                  <c:v>224.046245</c:v>
+                  <c:v>260.28635999999995</c:v>
                 </c:pt>
                 <c:pt idx="5">
-                  <c:v>175.6911225</c:v>
+                  <c:v>194.59256</c:v>
                 </c:pt>
                 <c:pt idx="6">
-                  <c:v>123.8726959375</c:v>
+                  <c:v>153.5588053125</c:v>
                 </c:pt>
                 <c:pt idx="7">
-                  <c:v>100.356685</c:v>
+                  <c:v>104.697685</c:v>
                 </c:pt>
                 <c:pt idx="8">
-                  <c:v>89.638936875</c:v>
+                  <c:v>98.17261937500001</c:v>
                 </c:pt>
                 <c:pt idx="9">
-                  <c:v>13.196639999999999</c:v>
+                  <c:v>54.841300000000004</c:v>
+                </c:pt>
+                <c:pt idx="10">
+                  <c:v>0</c:v>
                 </c:pt>
               </c:numCache>
             </c:numRef>
@@ -1309,38 +1315,41 @@
           </c:dLbls>
           <c:cat>
             <c:multiLvlStrRef>
-              <c:f>Sheet1!$A$2:$A$11</c:f>
+              <c:f>Sheet1!$A$2:$A$12</c:f>
               <c:multiLvlStrCache>
-                <c:ptCount val="10"/>
+                <c:ptCount val="11"/>
                 <c:lvl>
                   <c:pt idx="0">
+                    <c:v>Pre-launch</c:v>
+                  </c:pt>
+                  <c:pt idx="1">
                     <c:v>Y1</c:v>
                   </c:pt>
-                  <c:pt idx="1">
+                  <c:pt idx="2">
                     <c:v>Y2</c:v>
                   </c:pt>
-                  <c:pt idx="2">
+                  <c:pt idx="3">
                     <c:v>Y3</c:v>
                   </c:pt>
-                  <c:pt idx="3">
+                  <c:pt idx="4">
                     <c:v>Y4</c:v>
                   </c:pt>
-                  <c:pt idx="4">
+                  <c:pt idx="5">
                     <c:v>Y5</c:v>
                   </c:pt>
-                  <c:pt idx="5">
+                  <c:pt idx="6">
                     <c:v>Y6</c:v>
                   </c:pt>
-                  <c:pt idx="6">
+                  <c:pt idx="7">
                     <c:v>Y7</c:v>
                   </c:pt>
-                  <c:pt idx="7">
+                  <c:pt idx="8">
                     <c:v>Y8</c:v>
                   </c:pt>
-                  <c:pt idx="8">
+                  <c:pt idx="9">
                     <c:v>Y9</c:v>
                   </c:pt>
-                  <c:pt idx="9">
+                  <c:pt idx="10">
                     <c:v>Y10</c:v>
                   </c:pt>
                 </c:lvl>
@@ -1349,39 +1358,42 @@
           </c:cat>
           <c:val>
             <c:numRef>
-              <c:f>Sheet1!$C$2:$C$11</c:f>
+              <c:f>Sheet1!$C$2:$C$12</c:f>
               <c:numCache>
                 <c:formatCode>General</c:formatCode>
-                <c:ptCount val="10"/>
+                <c:ptCount val="11"/>
                 <c:pt idx="0">
-                  <c:v>-125</c:v>
+                  <c:v>-102.5</c:v>
                 </c:pt>
                 <c:pt idx="1">
-                  <c:v>-90</c:v>
+                  <c:v>-67.5</c:v>
                 </c:pt>
                 <c:pt idx="2">
-                  <c:v>-135</c:v>
+                  <c:v>-112.5</c:v>
                 </c:pt>
                 <c:pt idx="3">
-                  <c:v>-180</c:v>
+                  <c:v>-157.5</c:v>
                 </c:pt>
                 <c:pt idx="4">
                   <c:v>-180</c:v>
                 </c:pt>
                 <c:pt idx="5">
-                  <c:v>-90</c:v>
+                  <c:v>-135</c:v>
                 </c:pt>
                 <c:pt idx="6">
-                  <c:v>0</c:v>
+                  <c:v>-45</c:v>
                 </c:pt>
                 <c:pt idx="7">
-                  <c:v>-140.68774761718748</c:v>
+                  <c:v>-118.73472277343753</c:v>
                 </c:pt>
                 <c:pt idx="8">
-                  <c:v>-39.217034882812456</c:v>
+                  <c:v>-42.950520976562444</c:v>
                 </c:pt>
                 <c:pt idx="9">
-                  <c:v>-5.773529999999993</c:v>
+                  <c:v>-23.993068749999974</c:v>
+                </c:pt>
+                <c:pt idx="10">
+                  <c:v>0</c:v>
                 </c:pt>
               </c:numCache>
             </c:numRef>
@@ -1434,38 +1446,41 @@
           </c:dLbls>
           <c:cat>
             <c:multiLvlStrRef>
-              <c:f>Sheet1!$A$2:$A$11</c:f>
+              <c:f>Sheet1!$A$2:$A$12</c:f>
               <c:multiLvlStrCache>
-                <c:ptCount val="10"/>
+                <c:ptCount val="11"/>
                 <c:lvl>
                   <c:pt idx="0">
+                    <c:v>Pre-launch</c:v>
+                  </c:pt>
+                  <c:pt idx="1">
                     <c:v>Y1</c:v>
                   </c:pt>
-                  <c:pt idx="1">
+                  <c:pt idx="2">
                     <c:v>Y2</c:v>
                   </c:pt>
-                  <c:pt idx="2">
+                  <c:pt idx="3">
                     <c:v>Y3</c:v>
                   </c:pt>
-                  <c:pt idx="3">
+                  <c:pt idx="4">
                     <c:v>Y4</c:v>
                   </c:pt>
-                  <c:pt idx="4">
+                  <c:pt idx="5">
                     <c:v>Y5</c:v>
                   </c:pt>
-                  <c:pt idx="5">
+                  <c:pt idx="6">
                     <c:v>Y6</c:v>
                   </c:pt>
-                  <c:pt idx="6">
+                  <c:pt idx="7">
                     <c:v>Y7</c:v>
                   </c:pt>
-                  <c:pt idx="7">
+                  <c:pt idx="8">
                     <c:v>Y8</c:v>
                   </c:pt>
-                  <c:pt idx="8">
+                  <c:pt idx="9">
                     <c:v>Y9</c:v>
                   </c:pt>
-                  <c:pt idx="9">
+                  <c:pt idx="10">
                     <c:v>Y10</c:v>
                   </c:pt>
                 </c:lvl>
@@ -1474,24 +1489,24 @@
           </c:cat>
           <c:val>
             <c:numRef>
-              <c:f>Sheet1!$D$2:$D$11</c:f>
+              <c:f>Sheet1!$D$2:$D$12</c:f>
               <c:numCache>
                 <c:formatCode>General</c:formatCode>
-                <c:ptCount val="10"/>
+                <c:ptCount val="11"/>
                 <c:pt idx="0">
                   <c:v>0</c:v>
                 </c:pt>
                 <c:pt idx="1">
-                  <c:v>-153.94278</c:v>
+                  <c:v>-53.36</c:v>
                 </c:pt>
                 <c:pt idx="2">
-                  <c:v>-105.88453999999999</c:v>
+                  <c:v>-180.3453</c:v>
                 </c:pt>
                 <c:pt idx="3">
-                  <c:v>-632.02584</c:v>
+                  <c:v>-319.08086000000003</c:v>
                 </c:pt>
                 <c:pt idx="4">
-                  <c:v>0</c:v>
+                  <c:v>-339.067</c:v>
                 </c:pt>
                 <c:pt idx="5">
                   <c:v>0</c:v>
@@ -1506,6 +1521,9 @@
                   <c:v>0</c:v>
                 </c:pt>
                 <c:pt idx="9">
+                  <c:v>0</c:v>
+                </c:pt>
+                <c:pt idx="10">
                   <c:v>0</c:v>
                 </c:pt>
               </c:numCache>
@@ -1615,38 +1633,41 @@
           </c:marker>
           <c:cat>
             <c:multiLvlStrRef>
-              <c:f>Sheet1!$A$2:$A$11</c:f>
+              <c:f>Sheet1!$A$2:$A$12</c:f>
               <c:multiLvlStrCache>
-                <c:ptCount val="10"/>
+                <c:ptCount val="11"/>
                 <c:lvl>
                   <c:pt idx="0">
+                    <c:v>Pre-launch</c:v>
+                  </c:pt>
+                  <c:pt idx="1">
                     <c:v>Y1</c:v>
                   </c:pt>
-                  <c:pt idx="1">
+                  <c:pt idx="2">
                     <c:v>Y2</c:v>
                   </c:pt>
-                  <c:pt idx="2">
+                  <c:pt idx="3">
                     <c:v>Y3</c:v>
                   </c:pt>
-                  <c:pt idx="3">
+                  <c:pt idx="4">
                     <c:v>Y4</c:v>
                   </c:pt>
-                  <c:pt idx="4">
+                  <c:pt idx="5">
                     <c:v>Y5</c:v>
                   </c:pt>
-                  <c:pt idx="5">
+                  <c:pt idx="6">
                     <c:v>Y6</c:v>
                   </c:pt>
-                  <c:pt idx="6">
+                  <c:pt idx="7">
                     <c:v>Y7</c:v>
                   </c:pt>
-                  <c:pt idx="7">
+                  <c:pt idx="8">
                     <c:v>Y8</c:v>
                   </c:pt>
-                  <c:pt idx="8">
+                  <c:pt idx="9">
                     <c:v>Y9</c:v>
                   </c:pt>
-                  <c:pt idx="9">
+                  <c:pt idx="10">
                     <c:v>Y10</c:v>
                   </c:pt>
                 </c:lvl>
@@ -1655,38 +1676,41 @@
           </c:cat>
           <c:val>
             <c:numRef>
-              <c:f>Sheet1!$E$2:$E$11</c:f>
+              <c:f>Sheet1!$E$2:$E$12</c:f>
               <c:numCache>
                 <c:formatCode>General</c:formatCode>
-                <c:ptCount val="10"/>
+                <c:ptCount val="11"/>
                 <c:pt idx="0">
-                  <c:v>-79.58228749999999</c:v>
+                  <c:v>-102.5</c:v>
                 </c:pt>
                 <c:pt idx="1">
-                  <c:v>-88.42826437499998</c:v>
+                  <c:v>-68.68474375</c:v>
                 </c:pt>
                 <c:pt idx="2">
-                  <c:v>608.3816315625002</c:v>
+                  <c:v>339.89190156250015</c:v>
                 </c:pt>
                 <c:pt idx="3">
-                  <c:v>104.32351468750014</c:v>
+                  <c:v>394.04351031250013</c:v>
                 </c:pt>
                 <c:pt idx="4">
-                  <c:v>148.3697596875001</c:v>
+                  <c:v>135.26287031250013</c:v>
                 </c:pt>
                 <c:pt idx="5">
-                  <c:v>234.0608821875001</c:v>
+                  <c:v>194.85543031250012</c:v>
                 </c:pt>
                 <c:pt idx="6">
-                  <c:v>357.9335781250001</c:v>
+                  <c:v>303.4142356250001</c:v>
                 </c:pt>
                 <c:pt idx="7">
-                  <c:v>317.6025155078126</c:v>
+                  <c:v>289.3771978515626</c:v>
                 </c:pt>
                 <c:pt idx="8">
-                  <c:v>368.02441750000014</c:v>
+                  <c:v>344.5992962500001</c:v>
                 </c:pt>
                 <c:pt idx="9">
+                  <c:v>375.44752750000015</c:v>
+                </c:pt>
+                <c:pt idx="10">
                   <c:v>375.44752750000015</c:v>
                 </c:pt>
               </c:numCache>
@@ -4951,7 +4975,7 @@
                 <a:ea typeface="Cambria" pitchFamily="34" charset="-122"/>
                 <a:cs typeface="Cambria" pitchFamily="34" charset="-120"/>
               </a:rPr>
-              <a:t>215</a:t>
+              <a:t>230</a:t>
             </a:r>
             <a:endParaRPr lang="en-US" sz="3000" dirty="0"/>
           </a:p>
@@ -5089,7 +5113,7 @@
                   <a:srgbClr val="6B7280"/>
                 </a:solidFill>
               </a:rPr>
-              <a:t>Peak cumulative shortage, EGP million (month 6)</a:t>
+              <a:t>Peak cumulative shortage, EGP million (month 0)</a:t>
             </a:r>
             <a:endParaRPr lang="en-US" sz="1200" dirty="0"/>
           </a:p>
@@ -5125,7 +5149,7 @@
                   <a:srgbClr val="6B7280"/>
                 </a:solidFill>
               </a:rPr>
-              <a:t>Source: Jalour financial model; Financial Annex, Project_CF sheet. Project years: Y1 = months 1 to 12. Excludes the 20% of units retained by Jalour.</a:t>
+              <a:t>Source: Jalour financial model; Financial Annex, Project_CF sheet. Project years: Y1 = months 1 to 12; Pre-launch = before month 1.</a:t>
             </a:r>
             <a:endParaRPr lang="en-US" sz="900" dirty="0"/>
           </a:p>
@@ -7369,7 +7393,7 @@
                             <a:srgbClr val="1B1F2A"/>
                           </a:solidFill>
                         </a:rPr>
-                        <a:t>Allocation at signing; handover month 48; resale from month 51</a:t>
+                        <a:t>Allocation at signing; handover month 42; resale from month 45</a:t>
                       </a:r>
                       <a:endParaRPr lang="en-US" sz="1300" dirty="0"/>
                     </a:p>
@@ -7430,7 +7454,7 @@
                             <a:srgbClr val="1B1F2A"/>
                           </a:solidFill>
                         </a:rPr>
-                        <a:t>Grace 24 months; 12 quarterly instalments, months 30 to 63</a:t>
+                        <a:t>Grace 24 months; 12 quarterly instalments, months 24 to 57</a:t>
                       </a:r>
                       <a:endParaRPr lang="en-US" sz="1300" dirty="0"/>
                     </a:p>
@@ -8479,7 +8503,7 @@
                             <a:srgbClr val="1B1F2A"/>
                           </a:solidFill>
                         </a:rPr>
-                        <a:t>Month 54</a:t>
+                        <a:t>Month 48</a:t>
                       </a:r>
                       <a:endParaRPr lang="en-US" sz="1300" dirty="0"/>
                     </a:p>
@@ -8540,7 +8564,7 @@
                             <a:srgbClr val="1B1F2A"/>
                           </a:solidFill>
                         </a:rPr>
-                        <a:t>Month 45</a:t>
+                        <a:t>Month 39</a:t>
                       </a:r>
                       <a:endParaRPr lang="en-US" sz="1300" dirty="0"/>
                     </a:p>
@@ -9739,7 +9763,7 @@
                             <a:srgbClr val="1B1F2A"/>
                           </a:solidFill>
                         </a:rPr>
-                        <a:t>215</a:t>
+                        <a:t>230</a:t>
                       </a:r>
                       <a:endParaRPr lang="en-US" sz="1200" dirty="0"/>
                     </a:p>
@@ -9924,7 +9948,7 @@
                             <a:srgbClr val="1B1F2A"/>
                           </a:solidFill>
                         </a:rPr>
-                        <a:t>116</a:t>
+                        <a:t>124</a:t>
                       </a:r>
                       <a:endParaRPr lang="en-US" sz="1200" dirty="0"/>
                     </a:p>
@@ -10109,7 +10133,7 @@
                             <a:srgbClr val="1B1F2A"/>
                           </a:solidFill>
                         </a:rPr>
-                        <a:t>315</a:t>
+                        <a:t>336</a:t>
                       </a:r>
                       <a:endParaRPr lang="en-US" sz="1200" dirty="0"/>
                     </a:p>
@@ -10294,7 +10318,7 @@
                             <a:srgbClr val="1B1F2A"/>
                           </a:solidFill>
                         </a:rPr>
-                        <a:t>49</a:t>
+                        <a:t>52</a:t>
                       </a:r>
                       <a:endParaRPr lang="en-US" sz="1200" dirty="0"/>
                     </a:p>
@@ -10479,7 +10503,7 @@
                             <a:srgbClr val="1B1F2A"/>
                           </a:solidFill>
                         </a:rPr>
-                        <a:t>162</a:t>
+                        <a:t>173</a:t>
                       </a:r>
                       <a:endParaRPr lang="en-US" sz="1200" dirty="0"/>
                     </a:p>
@@ -10664,7 +10688,7 @@
                             <a:srgbClr val="1B1F2A"/>
                           </a:solidFill>
                         </a:rPr>
-                        <a:t>125</a:t>
+                        <a:t>134</a:t>
                       </a:r>
                       <a:endParaRPr lang="en-US" sz="1200" dirty="0"/>
                     </a:p>
@@ -10849,7 +10873,7 @@
                             <a:srgbClr val="1B1F2A"/>
                           </a:solidFill>
                         </a:rPr>
-                        <a:t>155</a:t>
+                        <a:t>166</a:t>
                       </a:r>
                       <a:endParaRPr lang="en-US" sz="1200" dirty="0"/>
                     </a:p>
@@ -12509,7 +12533,7 @@
         </p:nvSpPr>
         <p:spPr>
           <a:xfrm>
-            <a:off x="740664" y="3026664"/>
+            <a:off x="1218646" y="3026664"/>
             <a:ext cx="164592" cy="164592"/>
           </a:xfrm>
           <a:prstGeom prst="ellipse">
@@ -12534,7 +12558,7 @@
         </p:nvSpPr>
         <p:spPr>
           <a:xfrm>
-            <a:off x="45720" y="2103120"/>
+            <a:off x="523702" y="2103120"/>
             <a:ext cx="1554480" cy="822960"/>
           </a:xfrm>
           <a:prstGeom prst="rect">
@@ -12556,7 +12580,7 @@
                   <a:srgbClr val="1B1F2A"/>
                 </a:solidFill>
               </a:rPr>
-              <a:t>Model start</a:t>
+              <a:t>Funding</a:t>
             </a:r>
             <a:endParaRPr lang="en-US" sz="1100" dirty="0"/>
           </a:p>
@@ -12570,7 +12594,7 @@
                   <a:srgbClr val="1B1F2A"/>
                 </a:solidFill>
               </a:rPr>
-              <a:t>Month 0</a:t>
+              <a:t>Month -3</a:t>
             </a:r>
             <a:endParaRPr lang="en-US" sz="1100" dirty="0"/>
           </a:p>
@@ -12645,7 +12669,7 @@
                   <a:srgbClr val="1B1F2A"/>
                 </a:solidFill>
               </a:rPr>
-              <a:t>Month 7</a:t>
+              <a:t>Month 1</a:t>
             </a:r>
             <a:endParaRPr lang="en-US" sz="1100" dirty="0"/>
           </a:p>
@@ -12720,7 +12744,7 @@
                   <a:srgbClr val="1B1F2A"/>
                 </a:solidFill>
               </a:rPr>
-              <a:t>Month 13</a:t>
+              <a:t>Month 7</a:t>
             </a:r>
             <a:endParaRPr lang="en-US" sz="1100" dirty="0"/>
           </a:p>
@@ -12795,7 +12819,7 @@
                   <a:srgbClr val="1B1F2A"/>
                 </a:solidFill>
               </a:rPr>
-              <a:t>Month 27</a:t>
+              <a:t>Month 21</a:t>
             </a:r>
             <a:endParaRPr lang="en-US" sz="1100" dirty="0"/>
           </a:p>
@@ -12870,7 +12894,7 @@
                   <a:srgbClr val="1B1F2A"/>
                 </a:solidFill>
               </a:rPr>
-              <a:t>Month 30</a:t>
+              <a:t>Month 24</a:t>
             </a:r>
             <a:endParaRPr lang="en-US" sz="1100" dirty="0"/>
           </a:p>
@@ -12945,7 +12969,7 @@
                   <a:srgbClr val="1B1F2A"/>
                 </a:solidFill>
               </a:rPr>
-              <a:t>Month 48</a:t>
+              <a:t>Month 42</a:t>
             </a:r>
             <a:endParaRPr lang="en-US" sz="1100" dirty="0"/>
           </a:p>
@@ -13020,7 +13044,7 @@
                   <a:srgbClr val="1B1F2A"/>
                 </a:solidFill>
               </a:rPr>
-              <a:t>Month 51</a:t>
+              <a:t>Month 45</a:t>
             </a:r>
             <a:endParaRPr lang="en-US" sz="1100" dirty="0"/>
           </a:p>
@@ -13095,7 +13119,7 @@
                   <a:srgbClr val="1B1F2A"/>
                 </a:solidFill>
               </a:rPr>
-              <a:t>Month 63</a:t>
+              <a:t>Month 57</a:t>
             </a:r>
             <a:endParaRPr lang="en-US" sz="1100" dirty="0"/>
           </a:p>
@@ -13135,7 +13159,7 @@
                   <a:srgbClr val="1B1F2A"/>
                 </a:solidFill>
               </a:rPr>
-              <a:t>Funding and signing: month 3 (ticket due when the down payment of EGP 80 million falls due).</a:t>
+              <a:t>Funding and signing: month -3 (ticket due when the down payment of EGP 80 million falls due).</a:t>
             </a:r>
             <a:endParaRPr lang="en-US" sz="1300" dirty="0"/>
           </a:p>
@@ -13153,7 +13177,7 @@
                   <a:srgbClr val="1B1F2A"/>
                 </a:solidFill>
               </a:rPr>
-              <a:t>Option A: units are allocated at signing and delivered at handover (month 48); the investor may resell after consents.</a:t>
+              <a:t>Option A: units are allocated at signing and delivered at handover (month 42); the investor may resell after consents.</a:t>
             </a:r>
             <a:endParaRPr lang="en-US" sz="1300" dirty="0"/>
           </a:p>
@@ -13171,7 +13195,7 @@
                   <a:srgbClr val="1B1F2A"/>
                 </a:solidFill>
               </a:rPr>
-              <a:t>Option B: 24-month grace, then 12 quarterly instalments from month 30.</a:t>
+              <a:t>Option B: 24-month grace, then 12 quarterly instalments from month 24.</a:t>
             </a:r>
             <a:endParaRPr lang="en-US" sz="1300" dirty="0"/>
           </a:p>
@@ -13207,7 +13231,7 @@
                   <a:srgbClr val="6B7280"/>
                 </a:solidFill>
               </a:rPr>
-              <a:t>Source: Jalour financial model; Financial Annex. Months count from the start of the model timeline.</a:t>
+              <a:t>Source: Jalour financial model; Financial Annex. Months count from this project's sales launch (month 1).</a:t>
             </a:r>
             <a:endParaRPr lang="en-US" sz="900" dirty="0"/>
           </a:p>
@@ -14107,7 +14131,7 @@
                 <a:ea typeface="Cambria" pitchFamily="34" charset="-122"/>
                 <a:cs typeface="Cambria" pitchFamily="34" charset="-120"/>
               </a:rPr>
-              <a:t>Month 48</a:t>
+              <a:t>Month 42</a:t>
             </a:r>
             <a:endParaRPr lang="en-US" sz="3000" dirty="0"/>
           </a:p>
@@ -14143,7 +14167,7 @@
                   <a:srgbClr val="6B7280"/>
                 </a:solidFill>
               </a:rPr>
-              <a:t>Handover; sales from month 7, construction from month 13 for 36 months</a:t>
+              <a:t>Handover; sales from month 1, construction from month 7 for 36 months</a:t>
             </a:r>
             <a:endParaRPr lang="en-US" sz="1200" dirty="0"/>
           </a:p>
@@ -14245,7 +14269,7 @@
                   <a:srgbClr val="6B7280"/>
                 </a:solidFill>
               </a:rPr>
-              <a:t>Sales plan: 80% of units sold over the sales window, at modelled prices</a:t>
+              <a:t>Sales plan over the sales window, at modelled prices</a:t>
             </a:r>
             <a:endParaRPr lang="en-US" sz="1200" dirty="0"/>
           </a:p>
@@ -15334,7 +15358,7 @@
                             <a:srgbClr val="1B1F2A"/>
                           </a:solidFill>
                         </a:rPr>
-                        <a:t>EGP 115 million in 12 equal quarterly instalments of EGP 9.58 million; first payment month 30, last month 63</a:t>
+                        <a:t>EGP 115 million in 12 equal quarterly instalments of EGP 9.58 million; first payment month 24, last month 57</a:t>
                       </a:r>
                       <a:endParaRPr lang="en-US" sz="1300" dirty="0"/>
                     </a:p>
@@ -19157,7 +19181,7 @@
                             <a:srgbClr val="1B1F2A"/>
                           </a:solidFill>
                         </a:rPr>
-                        <a:t>Month 7</a:t>
+                        <a:t>Month 1</a:t>
                       </a:r>
                       <a:endParaRPr lang="en-US" sz="1400" dirty="0"/>
                     </a:p>
@@ -19281,7 +19305,7 @@
                             <a:srgbClr val="1B1F2A"/>
                           </a:solidFill>
                         </a:rPr>
-                        <a:t>Month 13 to 48 (36 months)</a:t>
+                        <a:t>Month 7 to 42 (36 months)</a:t>
                       </a:r>
                       <a:endParaRPr lang="en-US" sz="1400" dirty="0"/>
                     </a:p>
@@ -19405,7 +19429,7 @@
                             <a:srgbClr val="1B1F2A"/>
                           </a:solidFill>
                         </a:rPr>
-                        <a:t>Month 48</a:t>
+                        <a:t>Month 42</a:t>
                       </a:r>
                       <a:endParaRPr lang="en-US" sz="1400" dirty="0"/>
                     </a:p>
@@ -19503,7 +19527,7 @@
                   <a:srgbClr val="6B7280"/>
                 </a:solidFill>
               </a:rPr>
-              <a:t>Source: Jalour financial model (project summary). Jalour retains 20% of units, outside the sales plan and outside this offering.</a:t>
+              <a:t>Source: Jalour financial model (project summary).</a:t>
             </a:r>
             <a:endParaRPr lang="en-US" sz="900" dirty="0"/>
           </a:p>
@@ -21358,7 +21382,7 @@
                   <a:srgbClr val="1B1F2A"/>
                 </a:solidFill>
               </a:rPr>
-              <a:t>Total sales at 100% of units: EGP 2,816 million; plan sells 80%: EGP 2,253 million.</a:t>
+              <a:t>Sales plan: EGP 2,253 million at modelled prices; the landlord share is calculated on the full project sales value of EGP 2,816 million.</a:t>
             </a:r>
             <a:endParaRPr lang="en-US" sz="1200" dirty="0"/>
           </a:p>
